--- a/decks/englit-macbeth/englit-macbeth_ch3_lady-macbeth-and-gender.pptx
+++ b/decks/englit-macbeth/englit-macbeth_ch3_lady-macbeth-and-gender.pptx
@@ -123,36 +123,36 @@
   <p:extLst>
     <p:ext uri="{521415D9-36F7-43E2-AB2F-B90AF26B5E84}">
       <p14:sectionLst xmlns:p14="http://schemas.microsoft.com/office/powerpoint/2010/main">
-        <p14:section name="Opening" id="{088ddfcb-49ab-1b62-5dd5-d3a804b23116}">
+        <p14:section name="Opening" id="{51b3c3df-b829-3cd4-e09a-43d4c9e9222f}">
           <p14:sldIdLst>
             <p14:sldId id="256"/>
           </p14:sldIdLst>
         </p14:section>
-        <p14:section name="Gate" id="{c5ca03e9-a759-d793-38f5-033b98777edd}">
+        <p14:section name="Gate" id="{a601f1fe-ab67-884b-5a64-a09d3798c6c6}">
           <p14:sldIdLst>
             <p14:sldId id="257"/>
             <p14:sldId id="258"/>
           </p14:sldIdLst>
         </p14:section>
-        <p14:section name="Pre-teach" id="{e01eda44-2bfe-7350-74b2-503f93acfd53}">
+        <p14:section name="Pre-teach" id="{7c550b40-3401-5594-1ad3-8f6d05e0cacf}">
           <p14:sldIdLst>
             <p14:sldId id="259"/>
           </p14:sldIdLst>
         </p14:section>
-        <p14:section name="Read-along" id="{efe7249c-f68f-c248-1655-8900fa50d385}">
+        <p14:section name="Read-along" id="{2cd13238-d1b5-ab1f-e0c2-0683417785f2}">
           <p14:sldIdLst>
             <p14:sldId id="260"/>
             <p14:sldId id="261"/>
           </p14:sldIdLst>
         </p14:section>
-        <p14:section name="Teach" id="{6d42b033-8197-46ce-286f-0443595ff568}">
+        <p14:section name="Teach" id="{aa6d43a3-2de6-21d8-ea9a-60c34d0cabfc}">
           <p14:sldIdLst>
             <p14:sldId id="262"/>
             <p14:sldId id="263"/>
             <p14:sldId id="264"/>
           </p14:sldIdLst>
         </p14:section>
-        <p14:section name="Routes" id="{05fe6cbf-bbbc-07df-4be8-50251dd4d724}">
+        <p14:section name="Routes" id="{3bd6160b-d23b-916d-b90b-b7b26655995c}">
           <p14:sldIdLst>
             <p14:sldId id="265"/>
             <p14:sldId id="266"/>
@@ -160,12 +160,12 @@
             <p14:sldId id="268"/>
           </p14:sldIdLst>
         </p14:section>
-        <p14:section name="Close" id="{ee010546-04e4-a4b6-3f60-ad26bb83ef07}">
+        <p14:section name="Close" id="{909e93b1-efd2-63d7-5bfa-58f5a43f2a0e}">
           <p14:sldIdLst>
             <p14:sldId id="269"/>
           </p14:sldIdLst>
         </p14:section>
-        <p14:section name="Answers" id="{3f704466-072a-5d6a-024b-5d13e27789a1}">
+        <p14:section name="Answers" id="{a51ef82d-e6be-239d-599d-a490b69968d0}">
           <p14:sldIdLst>
             <p14:sldId id="270"/>
             <p14:sldId id="271"/>
@@ -1045,7 +1045,7 @@
               <a:rPr lang="en-US" dirty="0"/>
               <a:t>Exit ticket — individual, silent, on a slip or mini-whiteboard. Recall before help: no notes, no lanes, no hints. Collect before pupils leave.
 Question: When Lady Macbeth reads the letter, what does she fear about her husband?
-Answer: A   He is too kind to kill. She says his nature is “too full o' th' milk of human kindness”. She sees his kindness as a weakness.
+Answer: D   He is too kind to kill. She says his nature is “too full o' th' milk of human kindness”. She sees his kindness as a weakness.
 Source of this question: gate item 1 re-asked (options rotated) — this chapter has no third quick-check module.
 Sort the slips: correct → ready to move on; incorrect → start next lesson in the pre-teach group, with the read-along and the Support lane. Same destination next time.</a:t>
             </a:r>
@@ -1320,7 +1320,7 @@
             <a:r>
               <a:rPr lang="en-US" dirty="0"/>
               <a:t>Answers — exit ticket: Exit ticket. Reveal the answer; pupils mark their own work in a different colour, then read the "why" together. Same destination for every lane, so one answer serves the whole class.
-Answer: A   He is too kind to kill
+Answer: D   He is too kind to kill
 Why: She says his nature is “too full o' th' milk of human kindness”. She sees his kindness as a weakness.
 Ask a Support pupil to explain one step, and a Stretch pupil to share their extension.</a:t>
             </a:r>
@@ -1411,9 +1411,9 @@
             <a:r>
               <a:rPr lang="en-US" dirty="0"/>
               <a:t>Do now — retrieval. Silent, no notes, no help: recall comes before any support. Give about four minutes.
-1. When Lady Macbeth reads the letter, what does she fear about her husband?  →  B   He is too kind to kill
+1. When Lady Macbeth reads the letter, what does she fear about her husband?  →  A   He is too kind to kill
 2. Complete Lady Macbeth's advice: “Look like th' innocent flower, / But be the ___ under 't.”  →  serpent
-3. When Lady Macbeth asks spirits to ‘unsex’ her, what is she asking for?  →  B   To have her gentleness as a woman taken away, so she can be cruel
+3. When Lady Macbeth asks spirits to ‘unsex’ her, what is she asking for?  →  D   To have her gentleness as a woman taken away, so she can be cruel
 Circulate: who gets 3/3 (Stretch route), 2/3 (Core), 0–1 (Support)? Use this to route pupils later in the lesson.</a:t>
             </a:r>
             <a:endParaRPr lang="en-US" dirty="0"/>
@@ -1503,9 +1503,9 @@
             <a:r>
               <a:rPr lang="en-US" dirty="0"/>
               <a:t>Answers — pupils mark their own in a different colour, then hands up for 3/3, 2/3, 1/3.
-1. B   He is too kind to kill. She says his nature is “too full o' th' milk of human kindness”. She sees his kindness as a weakness.
+1. A   He is too kind to kill. She says his nature is “too full o' th' milk of human kindness”. She sees his kindness as a weakness.
 2. serpent. Shakespeare's word is ‘serpent’, which links to the tempter in the Garden of Eden.
-3. B   To have her gentleness as a woman taken away, so she can be cruel. She links womanhood with gentleness and wants it removed so that nothing stops her purpose.
+3. D   To have her gentleness as a woman taken away, so she can be cruel. She links womanhood with gentleness and wants it removed so that nothing stops her purpose.
 Say the route each score points to: 3/3 Stretch, 2/3 Core, 0–1 Support. Pupils may choose to move up.</a:t>
             </a:r>
             <a:endParaRPr lang="en-US" dirty="0"/>
@@ -7732,7 +7732,7 @@
                 <a:ea typeface="Calibri" pitchFamily="34" charset="-122"/>
                 <a:cs typeface="Calibri" pitchFamily="34" charset="-120"/>
               </a:rPr>
-              <a:t>He is too kind to kill</a:t>
+              <a:t>He does not want to be king</a:t>
             </a:r>
             <a:endParaRPr lang="en-US" sz="2400" dirty="0"/>
           </a:p>
@@ -7769,7 +7769,7 @@
                 <a:ea typeface="Calibri" pitchFamily="34" charset="-122"/>
                 <a:cs typeface="Calibri" pitchFamily="34" charset="-120"/>
               </a:rPr>
-              <a:t>He does not want to be king</a:t>
+              <a:t>He will tell Banquo</a:t>
             </a:r>
             <a:endParaRPr lang="en-US" sz="2400" dirty="0"/>
           </a:p>
@@ -7806,7 +7806,7 @@
                 <a:ea typeface="Calibri" pitchFamily="34" charset="-122"/>
                 <a:cs typeface="Calibri" pitchFamily="34" charset="-120"/>
               </a:rPr>
-              <a:t>He will tell Banquo</a:t>
+              <a:t>He is too cruel</a:t>
             </a:r>
             <a:endParaRPr lang="en-US" sz="2400" dirty="0"/>
           </a:p>
@@ -7843,7 +7843,7 @@
                 <a:ea typeface="Calibri" pitchFamily="34" charset="-122"/>
                 <a:cs typeface="Calibri" pitchFamily="34" charset="-120"/>
               </a:rPr>
-              <a:t>He is too cruel</a:t>
+              <a:t>He is too kind to kill</a:t>
             </a:r>
             <a:endParaRPr lang="en-US" sz="2400" dirty="0"/>
           </a:p>
@@ -9520,7 +9520,7 @@
                 <a:ea typeface="Cambria" pitchFamily="34" charset="-122"/>
                 <a:cs typeface="Cambria" pitchFamily="34" charset="-120"/>
               </a:rPr>
-              <a:t>A   He is too kind to kill</a:t>
+              <a:t>D   He is too kind to kill</a:t>
             </a:r>
             <a:endParaRPr lang="en-US" sz="1800" dirty="0"/>
           </a:p>
@@ -10024,7 +10024,7 @@
           <a:p>
             <a:pPr algn="l" indent="0" marL="0">
               <a:spcAft>
-                <a:spcPts val="600"/>
+                <a:spcPts val="200"/>
               </a:spcAft>
               <a:buNone/>
             </a:pPr>
@@ -10041,7 +10041,7 @@
             </a:r>
             <a:pPr algn="l" indent="0" marL="0">
               <a:spcAft>
-                <a:spcPts val="600"/>
+                <a:spcPts val="200"/>
               </a:spcAft>
               <a:buNone/>
             </a:pPr>
@@ -10054,118 +10054,118 @@
                 <a:ea typeface="Calibri" pitchFamily="34" charset="-122"/>
                 <a:cs typeface="Calibri" pitchFamily="34" charset="-120"/>
               </a:rPr>
+              <a:t>He is too kind to kill</a:t>
+            </a:r>
+            <a:endParaRPr lang="en-US" sz="2200" dirty="0"/>
+          </a:p>
+          <a:p>
+            <a:pPr algn="l" indent="0" marL="0">
+              <a:spcAft>
+                <a:spcPts val="200"/>
+              </a:spcAft>
+              <a:buNone/>
+            </a:pPr>
+            <a:r>
+              <a:rPr lang="en-US" sz="2200" b="1" dirty="0">
+                <a:solidFill>
+                  <a:srgbClr val="B8862B"/>
+                </a:solidFill>
+                <a:latin typeface="Calibri" pitchFamily="34" charset="0"/>
+                <a:ea typeface="Calibri" pitchFamily="34" charset="-122"/>
+                <a:cs typeface="Calibri" pitchFamily="34" charset="-120"/>
+              </a:rPr>
+              <a:t>B   </a:t>
+            </a:r>
+            <a:pPr algn="l" indent="0" marL="0">
+              <a:spcAft>
+                <a:spcPts val="200"/>
+              </a:spcAft>
+              <a:buNone/>
+            </a:pPr>
+            <a:r>
+              <a:rPr lang="en-US" sz="2200" dirty="0">
+                <a:solidFill>
+                  <a:srgbClr val="1E2229"/>
+                </a:solidFill>
+                <a:latin typeface="Calibri" pitchFamily="34" charset="0"/>
+                <a:ea typeface="Calibri" pitchFamily="34" charset="-122"/>
+                <a:cs typeface="Calibri" pitchFamily="34" charset="-120"/>
+              </a:rPr>
+              <a:t>He does not want to be king</a:t>
+            </a:r>
+            <a:endParaRPr lang="en-US" sz="2200" dirty="0"/>
+          </a:p>
+          <a:p>
+            <a:pPr algn="l" indent="0" marL="0">
+              <a:spcAft>
+                <a:spcPts val="200"/>
+              </a:spcAft>
+              <a:buNone/>
+            </a:pPr>
+            <a:r>
+              <a:rPr lang="en-US" sz="2200" b="1" dirty="0">
+                <a:solidFill>
+                  <a:srgbClr val="B8862B"/>
+                </a:solidFill>
+                <a:latin typeface="Calibri" pitchFamily="34" charset="0"/>
+                <a:ea typeface="Calibri" pitchFamily="34" charset="-122"/>
+                <a:cs typeface="Calibri" pitchFamily="34" charset="-120"/>
+              </a:rPr>
+              <a:t>C   </a:t>
+            </a:r>
+            <a:pPr algn="l" indent="0" marL="0">
+              <a:spcAft>
+                <a:spcPts val="200"/>
+              </a:spcAft>
+              <a:buNone/>
+            </a:pPr>
+            <a:r>
+              <a:rPr lang="en-US" sz="2200" dirty="0">
+                <a:solidFill>
+                  <a:srgbClr val="1E2229"/>
+                </a:solidFill>
+                <a:latin typeface="Calibri" pitchFamily="34" charset="0"/>
+                <a:ea typeface="Calibri" pitchFamily="34" charset="-122"/>
+                <a:cs typeface="Calibri" pitchFamily="34" charset="-120"/>
+              </a:rPr>
+              <a:t>He will tell Banquo</a:t>
+            </a:r>
+            <a:endParaRPr lang="en-US" sz="2200" dirty="0"/>
+          </a:p>
+          <a:p>
+            <a:pPr algn="l" indent="0" marL="0">
+              <a:spcAft>
+                <a:spcPts val="200"/>
+              </a:spcAft>
+              <a:buNone/>
+            </a:pPr>
+            <a:r>
+              <a:rPr lang="en-US" sz="2200" b="1" dirty="0">
+                <a:solidFill>
+                  <a:srgbClr val="B8862B"/>
+                </a:solidFill>
+                <a:latin typeface="Calibri" pitchFamily="34" charset="0"/>
+                <a:ea typeface="Calibri" pitchFamily="34" charset="-122"/>
+                <a:cs typeface="Calibri" pitchFamily="34" charset="-120"/>
+              </a:rPr>
+              <a:t>D   </a:t>
+            </a:r>
+            <a:pPr algn="l" indent="0" marL="0">
+              <a:spcAft>
+                <a:spcPts val="200"/>
+              </a:spcAft>
+              <a:buNone/>
+            </a:pPr>
+            <a:r>
+              <a:rPr lang="en-US" sz="2200" dirty="0">
+                <a:solidFill>
+                  <a:srgbClr val="1E2229"/>
+                </a:solidFill>
+                <a:latin typeface="Calibri" pitchFamily="34" charset="0"/>
+                <a:ea typeface="Calibri" pitchFamily="34" charset="-122"/>
+                <a:cs typeface="Calibri" pitchFamily="34" charset="-120"/>
+              </a:rPr>
               <a:t>He is too cruel</a:t>
-            </a:r>
-            <a:endParaRPr lang="en-US" sz="2200" dirty="0"/>
-          </a:p>
-          <a:p>
-            <a:pPr algn="l" indent="0" marL="0">
-              <a:spcAft>
-                <a:spcPts val="600"/>
-              </a:spcAft>
-              <a:buNone/>
-            </a:pPr>
-            <a:r>
-              <a:rPr lang="en-US" sz="2200" b="1" dirty="0">
-                <a:solidFill>
-                  <a:srgbClr val="B8862B"/>
-                </a:solidFill>
-                <a:latin typeface="Calibri" pitchFamily="34" charset="0"/>
-                <a:ea typeface="Calibri" pitchFamily="34" charset="-122"/>
-                <a:cs typeface="Calibri" pitchFamily="34" charset="-120"/>
-              </a:rPr>
-              <a:t>B   </a:t>
-            </a:r>
-            <a:pPr algn="l" indent="0" marL="0">
-              <a:spcAft>
-                <a:spcPts val="600"/>
-              </a:spcAft>
-              <a:buNone/>
-            </a:pPr>
-            <a:r>
-              <a:rPr lang="en-US" sz="2200" dirty="0">
-                <a:solidFill>
-                  <a:srgbClr val="1E2229"/>
-                </a:solidFill>
-                <a:latin typeface="Calibri" pitchFamily="34" charset="0"/>
-                <a:ea typeface="Calibri" pitchFamily="34" charset="-122"/>
-                <a:cs typeface="Calibri" pitchFamily="34" charset="-120"/>
-              </a:rPr>
-              <a:t>He is too kind to kill</a:t>
-            </a:r>
-            <a:endParaRPr lang="en-US" sz="2200" dirty="0"/>
-          </a:p>
-          <a:p>
-            <a:pPr algn="l" indent="0" marL="0">
-              <a:spcAft>
-                <a:spcPts val="600"/>
-              </a:spcAft>
-              <a:buNone/>
-            </a:pPr>
-            <a:r>
-              <a:rPr lang="en-US" sz="2200" b="1" dirty="0">
-                <a:solidFill>
-                  <a:srgbClr val="B8862B"/>
-                </a:solidFill>
-                <a:latin typeface="Calibri" pitchFamily="34" charset="0"/>
-                <a:ea typeface="Calibri" pitchFamily="34" charset="-122"/>
-                <a:cs typeface="Calibri" pitchFamily="34" charset="-120"/>
-              </a:rPr>
-              <a:t>C   </a:t>
-            </a:r>
-            <a:pPr algn="l" indent="0" marL="0">
-              <a:spcAft>
-                <a:spcPts val="600"/>
-              </a:spcAft>
-              <a:buNone/>
-            </a:pPr>
-            <a:r>
-              <a:rPr lang="en-US" sz="2200" dirty="0">
-                <a:solidFill>
-                  <a:srgbClr val="1E2229"/>
-                </a:solidFill>
-                <a:latin typeface="Calibri" pitchFamily="34" charset="0"/>
-                <a:ea typeface="Calibri" pitchFamily="34" charset="-122"/>
-                <a:cs typeface="Calibri" pitchFamily="34" charset="-120"/>
-              </a:rPr>
-              <a:t>He does not want to be king</a:t>
-            </a:r>
-            <a:endParaRPr lang="en-US" sz="2200" dirty="0"/>
-          </a:p>
-          <a:p>
-            <a:pPr algn="l" indent="0" marL="0">
-              <a:spcAft>
-                <a:spcPts val="600"/>
-              </a:spcAft>
-              <a:buNone/>
-            </a:pPr>
-            <a:r>
-              <a:rPr lang="en-US" sz="2200" b="1" dirty="0">
-                <a:solidFill>
-                  <a:srgbClr val="B8862B"/>
-                </a:solidFill>
-                <a:latin typeface="Calibri" pitchFamily="34" charset="0"/>
-                <a:ea typeface="Calibri" pitchFamily="34" charset="-122"/>
-                <a:cs typeface="Calibri" pitchFamily="34" charset="-120"/>
-              </a:rPr>
-              <a:t>D   </a:t>
-            </a:r>
-            <a:pPr algn="l" indent="0" marL="0">
-              <a:spcAft>
-                <a:spcPts val="600"/>
-              </a:spcAft>
-              <a:buNone/>
-            </a:pPr>
-            <a:r>
-              <a:rPr lang="en-US" sz="2200" dirty="0">
-                <a:solidFill>
-                  <a:srgbClr val="1E2229"/>
-                </a:solidFill>
-                <a:latin typeface="Calibri" pitchFamily="34" charset="0"/>
-                <a:ea typeface="Calibri" pitchFamily="34" charset="-122"/>
-                <a:cs typeface="Calibri" pitchFamily="34" charset="-120"/>
-              </a:rPr>
-              <a:t>He will tell Banquo</a:t>
             </a:r>
             <a:endParaRPr lang="en-US" sz="2200" dirty="0"/>
           </a:p>
@@ -10522,7 +10522,7 @@
               <a:buNone/>
             </a:pPr>
             <a:r>
-              <a:rPr lang="en-US" sz="2000" b="1" dirty="0">
+              <a:rPr lang="en-US" sz="1800" b="1" dirty="0">
                 <a:solidFill>
                   <a:srgbClr val="1E2229"/>
                 </a:solidFill>
@@ -10532,7 +10532,7 @@
               </a:rPr>
               <a:t>When Lady Macbeth asks spirits to ‘unsex’ her, what is she asking for?</a:t>
             </a:r>
-            <a:endParaRPr lang="en-US" sz="2000" dirty="0"/>
+            <a:endParaRPr lang="en-US" sz="1800" dirty="0"/>
           </a:p>
           <a:p>
             <a:pPr algn="l" indent="0" marL="0">
@@ -10542,7 +10542,7 @@
               <a:buNone/>
             </a:pPr>
             <a:r>
-              <a:rPr lang="en-US" sz="2000" b="1" dirty="0">
+              <a:rPr lang="en-US" sz="1800" b="1" dirty="0">
                 <a:solidFill>
                   <a:srgbClr val="B8862B"/>
                 </a:solidFill>
@@ -10559,7 +10559,7 @@
               <a:buNone/>
             </a:pPr>
             <a:r>
-              <a:rPr lang="en-US" sz="2000" dirty="0">
+              <a:rPr lang="en-US" sz="1800" dirty="0">
                 <a:solidFill>
                   <a:srgbClr val="1E2229"/>
                 </a:solidFill>
@@ -10567,9 +10567,9 @@
                 <a:ea typeface="Calibri" pitchFamily="34" charset="-122"/>
                 <a:cs typeface="Calibri" pitchFamily="34" charset="-120"/>
               </a:rPr>
-              <a:t>To become a man</a:t>
-            </a:r>
-            <a:endParaRPr lang="en-US" sz="2000" dirty="0"/>
+              <a:t>To be made queen at once</a:t>
+            </a:r>
+            <a:endParaRPr lang="en-US" sz="1800" dirty="0"/>
           </a:p>
           <a:p>
             <a:pPr algn="l" indent="0" marL="0">
@@ -10579,7 +10579,7 @@
               <a:buNone/>
             </a:pPr>
             <a:r>
-              <a:rPr lang="en-US" sz="2000" b="1" dirty="0">
+              <a:rPr lang="en-US" sz="1800" b="1" dirty="0">
                 <a:solidFill>
                   <a:srgbClr val="B8862B"/>
                 </a:solidFill>
@@ -10596,7 +10596,7 @@
               <a:buNone/>
             </a:pPr>
             <a:r>
-              <a:rPr lang="en-US" sz="2000" dirty="0">
+              <a:rPr lang="en-US" sz="1800" dirty="0">
                 <a:solidFill>
                   <a:srgbClr val="1E2229"/>
                 </a:solidFill>
@@ -10604,9 +10604,9 @@
                 <a:ea typeface="Calibri" pitchFamily="34" charset="-122"/>
                 <a:cs typeface="Calibri" pitchFamily="34" charset="-120"/>
               </a:rPr>
-              <a:t>To have her gentleness as a woman taken away, so she can be cruel</a:t>
-            </a:r>
-            <a:endParaRPr lang="en-US" sz="2000" dirty="0"/>
+              <a:t>To become a man</a:t>
+            </a:r>
+            <a:endParaRPr lang="en-US" sz="1800" dirty="0"/>
           </a:p>
           <a:p>
             <a:pPr algn="l" indent="0" marL="0">
@@ -10616,7 +10616,7 @@
               <a:buNone/>
             </a:pPr>
             <a:r>
-              <a:rPr lang="en-US" sz="2000" b="1" dirty="0">
+              <a:rPr lang="en-US" sz="1800" b="1" dirty="0">
                 <a:solidFill>
                   <a:srgbClr val="B8862B"/>
                 </a:solidFill>
@@ -10633,7 +10633,7 @@
               <a:buNone/>
             </a:pPr>
             <a:r>
-              <a:rPr lang="en-US" sz="2000" dirty="0">
+              <a:rPr lang="en-US" sz="1800" dirty="0">
                 <a:solidFill>
                   <a:srgbClr val="1E2229"/>
                 </a:solidFill>
@@ -10643,7 +10643,7 @@
               </a:rPr>
               <a:t>To become invisible</a:t>
             </a:r>
-            <a:endParaRPr lang="en-US" sz="2000" dirty="0"/>
+            <a:endParaRPr lang="en-US" sz="1800" dirty="0"/>
           </a:p>
           <a:p>
             <a:pPr algn="l" indent="0" marL="0">
@@ -10653,7 +10653,7 @@
               <a:buNone/>
             </a:pPr>
             <a:r>
-              <a:rPr lang="en-US" sz="2000" b="1" dirty="0">
+              <a:rPr lang="en-US" sz="1800" b="1" dirty="0">
                 <a:solidFill>
                   <a:srgbClr val="B8862B"/>
                 </a:solidFill>
@@ -10670,7 +10670,7 @@
               <a:buNone/>
             </a:pPr>
             <a:r>
-              <a:rPr lang="en-US" sz="2000" dirty="0">
+              <a:rPr lang="en-US" sz="1800" dirty="0">
                 <a:solidFill>
                   <a:srgbClr val="1E2229"/>
                 </a:solidFill>
@@ -10678,9 +10678,9 @@
                 <a:ea typeface="Calibri" pitchFamily="34" charset="-122"/>
                 <a:cs typeface="Calibri" pitchFamily="34" charset="-120"/>
               </a:rPr>
-              <a:t>To be made queen at once</a:t>
-            </a:r>
-            <a:endParaRPr lang="en-US" sz="2000" dirty="0"/>
+              <a:t>To have her gentleness as a woman taken away, so she can be cruel</a:t>
+            </a:r>
+            <a:endParaRPr lang="en-US" sz="1800" dirty="0"/>
           </a:p>
         </p:txBody>
       </p:sp>
@@ -11079,7 +11079,7 @@
                 <a:ea typeface="Calibri" pitchFamily="34" charset="-122"/>
                 <a:cs typeface="Calibri" pitchFamily="34" charset="-120"/>
               </a:rPr>
-              <a:t>B   He is too kind to kill</a:t>
+              <a:t>A   He is too kind to kill</a:t>
             </a:r>
             <a:endParaRPr lang="en-US" sz="2200" dirty="0"/>
           </a:p>
@@ -11579,7 +11579,7 @@
                 <a:ea typeface="Calibri" pitchFamily="34" charset="-122"/>
                 <a:cs typeface="Calibri" pitchFamily="34" charset="-120"/>
               </a:rPr>
-              <a:t>B   To have her gentleness as a woman taken away, so she can be cruel</a:t>
+              <a:t>D   To have her gentleness as a woman taken away, so she can be cruel</a:t>
             </a:r>
             <a:endParaRPr lang="en-US" sz="2200" dirty="0"/>
           </a:p>

--- a/decks/englit-macbeth/englit-macbeth_ch3_lady-macbeth-and-gender.pptx
+++ b/decks/englit-macbeth/englit-macbeth_ch3_lady-macbeth-and-gender.pptx
@@ -123,36 +123,36 @@
   <p:extLst>
     <p:ext uri="{521415D9-36F7-43E2-AB2F-B90AF26B5E84}">
       <p14:sectionLst xmlns:p14="http://schemas.microsoft.com/office/powerpoint/2010/main">
-        <p14:section name="Opening" id="{51b3c3df-b829-3cd4-e09a-43d4c9e9222f}">
+        <p14:section name="Opening" id="{727ee25c-a62d-10cc-8b5c-05c3e840745a}">
           <p14:sldIdLst>
             <p14:sldId id="256"/>
           </p14:sldIdLst>
         </p14:section>
-        <p14:section name="Gate" id="{a601f1fe-ab67-884b-5a64-a09d3798c6c6}">
+        <p14:section name="Gate" id="{dfa094d0-4ab0-09b6-c34d-9709e80f17da}">
           <p14:sldIdLst>
             <p14:sldId id="257"/>
             <p14:sldId id="258"/>
           </p14:sldIdLst>
         </p14:section>
-        <p14:section name="Pre-teach" id="{7c550b40-3401-5594-1ad3-8f6d05e0cacf}">
+        <p14:section name="Pre-teach" id="{61ea8b6c-163a-dba9-303a-c147c3b6ea47}">
           <p14:sldIdLst>
             <p14:sldId id="259"/>
           </p14:sldIdLst>
         </p14:section>
-        <p14:section name="Read-along" id="{2cd13238-d1b5-ab1f-e0c2-0683417785f2}">
+        <p14:section name="Read-along" id="{57a60561-b2c2-8002-ef10-706cb528c18f}">
           <p14:sldIdLst>
             <p14:sldId id="260"/>
             <p14:sldId id="261"/>
           </p14:sldIdLst>
         </p14:section>
-        <p14:section name="Teach" id="{aa6d43a3-2de6-21d8-ea9a-60c34d0cabfc}">
+        <p14:section name="Teach" id="{d9c4e146-bbd1-9462-1a5b-13708d2be777}">
           <p14:sldIdLst>
             <p14:sldId id="262"/>
             <p14:sldId id="263"/>
             <p14:sldId id="264"/>
           </p14:sldIdLst>
         </p14:section>
-        <p14:section name="Routes" id="{3bd6160b-d23b-916d-b90b-b7b26655995c}">
+        <p14:section name="Routes" id="{5f8992e9-1d83-d72d-5c3f-5d2d21307973}">
           <p14:sldIdLst>
             <p14:sldId id="265"/>
             <p14:sldId id="266"/>
@@ -160,12 +160,12 @@
             <p14:sldId id="268"/>
           </p14:sldIdLst>
         </p14:section>
-        <p14:section name="Close" id="{909e93b1-efd2-63d7-5bfa-58f5a43f2a0e}">
+        <p14:section name="Close" id="{77ce05fe-3eca-b226-7721-6e33caeecfcf}">
           <p14:sldIdLst>
             <p14:sldId id="269"/>
           </p14:sldIdLst>
         </p14:section>
-        <p14:section name="Answers" id="{a51ef82d-e6be-239d-599d-a490b69968d0}">
+        <p14:section name="Answers" id="{17d76752-559b-4430-5050-a8e8475ea9eb}">
           <p14:sldIdLst>
             <p14:sldId id="270"/>
             <p14:sldId id="271"/>
